--- a/materials/lecture-slides/Unit2_Lecture3.pptx
+++ b/materials/lecture-slides/Unit2_Lecture3.pptx
@@ -275,7 +275,7 @@
           <a:p>
             <a:fld id="{09BEBCC9-647F-5E45-BA5E-8CCC5D43C492}" type="datetimeFigureOut">
               <a:rPr lang="en-US" smtClean="0"/>
-              <a:t>9/2/25</a:t>
+              <a:t>11/24/25</a:t>
             </a:fld>
             <a:endParaRPr lang="en-US"/>
           </a:p>
@@ -1205,7 +1205,7 @@
           <a:p>
             <a:fld id="{7B1B529C-7AC4-498E-86D4-DC9A7DA9F898}" type="datetimeFigureOut">
               <a:rPr lang="en-US" smtClean="0"/>
-              <a:t>9/2/25</a:t>
+              <a:t>11/24/25</a:t>
             </a:fld>
             <a:endParaRPr lang="en-US"/>
           </a:p>
@@ -1403,7 +1403,7 @@
           <a:p>
             <a:fld id="{7B1B529C-7AC4-498E-86D4-DC9A7DA9F898}" type="datetimeFigureOut">
               <a:rPr lang="en-US" smtClean="0"/>
-              <a:t>9/2/25</a:t>
+              <a:t>11/24/25</a:t>
             </a:fld>
             <a:endParaRPr lang="en-US"/>
           </a:p>
@@ -1663,7 +1663,7 @@
           <a:p>
             <a:fld id="{7B1B529C-7AC4-498E-86D4-DC9A7DA9F898}" type="datetimeFigureOut">
               <a:rPr lang="en-US" smtClean="0"/>
-              <a:t>9/2/25</a:t>
+              <a:t>11/24/25</a:t>
             </a:fld>
             <a:endParaRPr lang="en-US"/>
           </a:p>
@@ -1915,7 +1915,7 @@
           <a:p>
             <a:fld id="{7B1B529C-7AC4-498E-86D4-DC9A7DA9F898}" type="datetimeFigureOut">
               <a:rPr lang="en-US" smtClean="0"/>
-              <a:t>9/2/25</a:t>
+              <a:t>11/24/25</a:t>
             </a:fld>
             <a:endParaRPr lang="en-US"/>
           </a:p>
@@ -2242,7 +2242,7 @@
           <a:p>
             <a:fld id="{7B1B529C-7AC4-498E-86D4-DC9A7DA9F898}" type="datetimeFigureOut">
               <a:rPr lang="en-US" smtClean="0"/>
-              <a:t>9/2/25</a:t>
+              <a:t>11/24/25</a:t>
             </a:fld>
             <a:endParaRPr lang="en-US"/>
           </a:p>
@@ -2559,7 +2559,7 @@
           <a:p>
             <a:fld id="{7B1B529C-7AC4-498E-86D4-DC9A7DA9F898}" type="datetimeFigureOut">
               <a:rPr lang="en-US" smtClean="0"/>
-              <a:t>9/2/25</a:t>
+              <a:t>11/24/25</a:t>
             </a:fld>
             <a:endParaRPr lang="en-US"/>
           </a:p>
@@ -3023,7 +3023,7 @@
           <a:p>
             <a:fld id="{7B1B529C-7AC4-498E-86D4-DC9A7DA9F898}" type="datetimeFigureOut">
               <a:rPr lang="en-US" smtClean="0"/>
-              <a:t>9/2/25</a:t>
+              <a:t>11/24/25</a:t>
             </a:fld>
             <a:endParaRPr lang="en-US"/>
           </a:p>
@@ -3216,7 +3216,7 @@
           <a:p>
             <a:fld id="{7B1B529C-7AC4-498E-86D4-DC9A7DA9F898}" type="datetimeFigureOut">
               <a:rPr lang="en-US" smtClean="0"/>
-              <a:t>9/2/25</a:t>
+              <a:t>11/24/25</a:t>
             </a:fld>
             <a:endParaRPr lang="en-US"/>
           </a:p>
@@ -3381,7 +3381,7 @@
           <a:p>
             <a:fld id="{7B1B529C-7AC4-498E-86D4-DC9A7DA9F898}" type="datetimeFigureOut">
               <a:rPr lang="en-US" smtClean="0"/>
-              <a:t>9/2/25</a:t>
+              <a:t>11/24/25</a:t>
             </a:fld>
             <a:endParaRPr lang="en-US"/>
           </a:p>
@@ -3744,7 +3744,7 @@
           <a:p>
             <a:fld id="{7B1B529C-7AC4-498E-86D4-DC9A7DA9F898}" type="datetimeFigureOut">
               <a:rPr lang="en-US" smtClean="0"/>
-              <a:t>9/2/25</a:t>
+              <a:t>11/24/25</a:t>
             </a:fld>
             <a:endParaRPr lang="en-US"/>
           </a:p>
@@ -4087,7 +4087,7 @@
           <a:p>
             <a:fld id="{7B1B529C-7AC4-498E-86D4-DC9A7DA9F898}" type="datetimeFigureOut">
               <a:rPr lang="en-US" smtClean="0"/>
-              <a:t>9/2/25</a:t>
+              <a:t>11/24/25</a:t>
             </a:fld>
             <a:endParaRPr lang="en-US"/>
           </a:p>
@@ -4421,7 +4421,7 @@
           <a:p>
             <a:fld id="{7B1B529C-7AC4-498E-86D4-DC9A7DA9F898}" type="datetimeFigureOut">
               <a:rPr lang="en-US" smtClean="0"/>
-              <a:t>9/2/25</a:t>
+              <a:t>11/24/25</a:t>
             </a:fld>
             <a:endParaRPr lang="en-US"/>
           </a:p>
